--- a/slides/4-4_preop_testing/4-4_preop_testing.pptx
+++ b/slides/4-4_preop_testing/4-4_preop_testing.pptx
@@ -2367,7 +2367,7 @@
         <p:spPr>
           <a:xfrm>
             <a:off x="502920" y="1783080"/>
-            <a:ext cx="11155680" cy="2999232"/>
+            <a:ext cx="11155680" cy="3099816"/>
           </a:xfrm>
           <a:prstGeom prst="rect">
             <a:avLst/>
@@ -2381,7 +2381,7 @@
           <a:p>
             <a:pPr algn="l" marL="355600" indent="-355600">
               <a:spcAft>
-                <a:spcPts val="1400"/>
+                <a:spcPts val="1600"/>
               </a:spcAft>
               <a:buSzPct val="100000"/>
               <a:buChar char="•"/>
@@ -2424,7 +2424,7 @@
           <a:p>
             <a:pPr algn="l" marL="355600" indent="-355600">
               <a:spcAft>
-                <a:spcPts val="1400"/>
+                <a:spcPts val="1600"/>
               </a:spcAft>
               <a:buSzPct val="100000"/>
               <a:buChar char="•"/>
@@ -2478,7 +2478,7 @@
           <a:p>
             <a:pPr algn="l" marL="355600" indent="-355600">
               <a:spcAft>
-                <a:spcPts val="1400"/>
+                <a:spcPts val="1600"/>
               </a:spcAft>
               <a:buSzPct val="100000"/>
               <a:buChar char="•"/>
@@ -2521,7 +2521,7 @@
           <a:p>
             <a:pPr algn="l" marL="355600" indent="-355600">
               <a:spcAft>
-                <a:spcPts val="1400"/>
+                <a:spcPts val="1600"/>
               </a:spcAft>
               <a:buSzPct val="100000"/>
               <a:buChar char="•"/>
@@ -2564,7 +2564,7 @@
           <a:p>
             <a:pPr algn="l" marL="355600" indent="-355600">
               <a:spcAft>
-                <a:spcPts val="1400"/>
+                <a:spcPts val="1600"/>
               </a:spcAft>
               <a:buSzPct val="100000"/>
               <a:buChar char="•"/>
@@ -2636,12 +2636,12 @@
         </p:nvSpPr>
         <p:spPr>
           <a:xfrm>
-            <a:off x="502920" y="5084064"/>
-            <a:ext cx="11183112" cy="786384"/>
+            <a:off x="502920" y="5138928"/>
+            <a:ext cx="11183112" cy="731520"/>
           </a:xfrm>
           <a:prstGeom prst="roundRect">
             <a:avLst>
-              <a:gd name="adj" fmla="val 11628"/>
+              <a:gd name="adj" fmla="val 12500"/>
             </a:avLst>
           </a:prstGeom>
           <a:solidFill>
@@ -2654,14 +2654,14 @@
           </a:ln>
         </p:spPr>
         <p:txBody>
-          <a:bodyPr wrap="square" lIns="109728" tIns="109728" rIns="109728" bIns="109728" rtlCol="0" anchor="ctr"/>
+          <a:bodyPr wrap="square" lIns="91440" tIns="91440" rIns="91440" bIns="91440" rtlCol="0" anchor="ctr"/>
           <a:lstStyle/>
           <a:p>
             <a:pPr algn="ctr" indent="0" marL="0">
               <a:buNone/>
             </a:pPr>
             <a:r>
-              <a:rPr lang="ja-JP" altLang="en-US" sz="2800" b="1" dirty="0">
+              <a:rPr lang="ja-JP" altLang="en-US" sz="2400" b="1" dirty="0">
                 <a:solidFill>
                   <a:srgbClr val="262626"/>
                 </a:solidFill>
@@ -2671,7 +2671,7 @@
               </a:rPr>
               <a:t>異常が出たとき何をするか決められない検査は、出さない</a:t>
             </a:r>
-            <a:endParaRPr lang="ja-JP" sz="2800" dirty="0"/>
+            <a:endParaRPr lang="ja-JP" sz="2400" dirty="0"/>
           </a:p>
         </p:txBody>
       </p:sp>
@@ -3080,8 +3080,8 @@
               <a:tblGrid>
                 <a:gridCol w="4023360"/>
                 <a:gridCol w="2377440"/>
-                <a:gridCol w="2093976"/>
-                <a:gridCol w="2660904"/>
+                <a:gridCol w="2377440"/>
+                <a:gridCol w="2377440"/>
               </a:tblGrid>
               <a:tr h="411480">
                 <a:tc>
@@ -3618,7 +3618,7 @@
                           <a:ea typeface="メイリオ" pitchFamily="34" charset="-122"/>
                           <a:cs typeface="メイリオ" pitchFamily="34" charset="-120"/>
                         </a:rPr>
-                        <a:t>腎機能・心電図を</a:t>
+                        <a:t>腎機能・</a:t>
                       </a:r>
                       <a:endParaRPr lang="en-US" sz="2200" dirty="0">
                         <a:latin typeface="メイリオ" charset="0"/>
@@ -3642,7 +3642,7 @@
                           <a:ea typeface="メイリオ" pitchFamily="34" charset="-122"/>
                           <a:cs typeface="メイリオ" pitchFamily="34" charset="-120"/>
                         </a:rPr>
-                        <a:t>考慮</a:t>
+                        <a:t>心電図を考慮</a:t>
                       </a:r>
                       <a:endParaRPr lang="en-US" sz="2200" dirty="0">
                         <a:latin typeface="メイリオ" charset="0"/>
@@ -3988,7 +3988,7 @@
                           <a:ea typeface="メイリオ" pitchFamily="34" charset="-122"/>
                           <a:cs typeface="メイリオ" pitchFamily="34" charset="-120"/>
                         </a:rPr>
-                        <a:t>腎機能・心電図。</a:t>
+                        <a:t>腎機能・</a:t>
                       </a:r>
                       <a:endParaRPr lang="en-US" sz="2200" dirty="0">
                         <a:latin typeface="メイリオ" charset="0"/>
@@ -4012,7 +4012,31 @@
                           <a:ea typeface="メイリオ" pitchFamily="34" charset="-122"/>
                           <a:cs typeface="メイリオ" pitchFamily="34" charset="-120"/>
                         </a:rPr>
-                        <a:t>血算・凝固は考慮</a:t>
+                        <a:t>心電図。血算・</a:t>
+                      </a:r>
+                      <a:endParaRPr lang="en-US" sz="2200" dirty="0">
+                        <a:latin typeface="メイリオ" charset="0"/>
+                        <a:ea typeface="メイリオ" charset="0"/>
+                        <a:cs typeface="メイリオ" charset="0"/>
+                      </a:endParaRPr>
+                    </a:p>
+                    <a:p>
+                      <a:pPr algn="l" indent="0" marL="0">
+                        <a:lnSpc>
+                          <a:spcPts val="2640"/>
+                        </a:lnSpc>
+                        <a:buNone/>
+                      </a:pPr>
+                      <a:r>
+                        <a:rPr lang="ja-JP" altLang="en-US" sz="2200" dirty="0">
+                          <a:solidFill>
+                            <a:srgbClr val="262626"/>
+                          </a:solidFill>
+                          <a:latin typeface="メイリオ" pitchFamily="34" charset="0"/>
+                          <a:ea typeface="メイリオ" pitchFamily="34" charset="-122"/>
+                          <a:cs typeface="メイリオ" pitchFamily="34" charset="-120"/>
+                        </a:rPr>
+                        <a:t>凝固は考慮</a:t>
                       </a:r>
                       <a:endParaRPr lang="en-US" sz="2200" dirty="0">
                         <a:latin typeface="メイリオ" charset="0"/>
@@ -4290,31 +4314,7 @@
                           <a:ea typeface="メイリオ" pitchFamily="34" charset="-122"/>
                           <a:cs typeface="メイリオ" pitchFamily="34" charset="-120"/>
                         </a:rPr>
-                        <a:t>血算、</a:t>
-                      </a:r>
-                      <a:endParaRPr lang="en-US" sz="2200" dirty="0">
-                        <a:latin typeface="メイリオ" charset="0"/>
-                        <a:ea typeface="メイリオ" charset="0"/>
-                        <a:cs typeface="メイリオ" charset="0"/>
-                      </a:endParaRPr>
-                    </a:p>
-                    <a:p>
-                      <a:pPr algn="l" indent="0" marL="0">
-                        <a:lnSpc>
-                          <a:spcPts val="2640"/>
-                        </a:lnSpc>
-                        <a:buNone/>
-                      </a:pPr>
-                      <a:r>
-                        <a:rPr lang="ja-JP" altLang="en-US" sz="2200" dirty="0">
-                          <a:solidFill>
-                            <a:srgbClr val="262626"/>
-                          </a:solidFill>
-                          <a:latin typeface="メイリオ" pitchFamily="34" charset="0"/>
-                          <a:ea typeface="メイリオ" pitchFamily="34" charset="-122"/>
-                          <a:cs typeface="メイリオ" pitchFamily="34" charset="-120"/>
-                        </a:rPr>
-                        <a:t>腎機能、</a:t>
+                        <a:t>血算、腎機能、</a:t>
                       </a:r>
                       <a:endParaRPr lang="en-US" sz="2200" dirty="0">
                         <a:latin typeface="メイリオ" charset="0"/>
@@ -6832,9 +6832,9 @@
             <a:tbl>
               <a:tblPr/>
               <a:tblGrid>
-                <a:gridCol w="2011680"/>
+                <a:gridCol w="2029968"/>
                 <a:gridCol w="5166360"/>
-                <a:gridCol w="3977640"/>
+                <a:gridCol w="3959352"/>
               </a:tblGrid>
               <a:tr h="411480">
                 <a:tc>
@@ -7858,31 +7858,7 @@
                           <a:ea typeface="メイリオ" pitchFamily="34" charset="-122"/>
                           <a:cs typeface="メイリオ" pitchFamily="34" charset="-120"/>
                         </a:rPr>
-                        <a:t>呼吸機能</a:t>
-                      </a:r>
-                      <a:endParaRPr lang="en-US" sz="2200" dirty="0">
-                        <a:latin typeface="メイリオ" charset="0"/>
-                        <a:ea typeface="メイリオ" charset="0"/>
-                        <a:cs typeface="メイリオ" charset="0"/>
-                      </a:endParaRPr>
-                    </a:p>
-                    <a:p>
-                      <a:pPr algn="l" indent="0" marL="0">
-                        <a:lnSpc>
-                          <a:spcPts val="2640"/>
-                        </a:lnSpc>
-                        <a:buNone/>
-                      </a:pPr>
-                      <a:r>
-                        <a:rPr lang="ja-JP" altLang="en-US" sz="2200" dirty="0">
-                          <a:solidFill>
-                            <a:srgbClr val="262626"/>
-                          </a:solidFill>
-                          <a:latin typeface="メイリオ" pitchFamily="34" charset="0"/>
-                          <a:ea typeface="メイリオ" pitchFamily="34" charset="-122"/>
-                          <a:cs typeface="メイリオ" pitchFamily="34" charset="-120"/>
-                        </a:rPr>
-                        <a:t>検査</a:t>
+                        <a:t>呼吸機能検査</a:t>
                       </a:r>
                       <a:endParaRPr lang="en-US" sz="2200" dirty="0">
                         <a:latin typeface="メイリオ" charset="0"/>
@@ -8452,7 +8428,7 @@
                 <a:ea typeface="メイリオ" pitchFamily="34" charset="-122"/>
                 <a:cs typeface="メイリオ" pitchFamily="34" charset="-120"/>
               </a:rPr>
-              <a:t>Yonekura H, et al. Anesth Analg 2018;126:1633-1640</a:t>
+              <a:t>Yonekura H, et al. Anesth Analg 2018;126:1633-1640 / Yonekura H, et al. BMJ Open</a:t>
             </a:r>
             <a:endParaRPr lang="ja-JP" sz="1600" dirty="0"/>
           </a:p>
@@ -8469,7 +8445,7 @@
                 <a:ea typeface="メイリオ" pitchFamily="34" charset="-122"/>
                 <a:cs typeface="メイリオ" pitchFamily="34" charset="-120"/>
               </a:rPr>
-              <a:t>Yonekura H, et al. BMJ Open 2019;9:e032306/Hanai S, et al. Sex Transm Dis 2025;52:402-406</a:t>
+              <a:t>2019;9:e032306 / Hanai S, et al. Sex Transm Dis 2025;52:402-406</a:t>
             </a:r>
             <a:endParaRPr lang="ja-JP" sz="1600" dirty="0"/>
           </a:p>
@@ -8484,7 +8460,7 @@
         <p:spPr>
           <a:xfrm>
             <a:off x="502920" y="1783080"/>
-            <a:ext cx="11155680" cy="2999232"/>
+            <a:ext cx="11155680" cy="3099816"/>
           </a:xfrm>
           <a:prstGeom prst="rect">
             <a:avLst/>
@@ -8498,7 +8474,7 @@
           <a:p>
             <a:pPr algn="l" marL="355600" indent="-355600">
               <a:spcAft>
-                <a:spcPts val="1400"/>
+                <a:spcPts val="1600"/>
               </a:spcAft>
               <a:buSzPct val="100000"/>
               <a:buChar char="•"/>
@@ -8541,7 +8517,7 @@
           <a:p>
             <a:pPr algn="l" marL="355600" indent="-355600">
               <a:spcAft>
-                <a:spcPts val="1400"/>
+                <a:spcPts val="1600"/>
               </a:spcAft>
               <a:buSzPct val="100000"/>
               <a:buChar char="•"/>
@@ -8573,7 +8549,7 @@
           <a:p>
             <a:pPr algn="l" marL="355600" indent="-355600">
               <a:spcAft>
-                <a:spcPts val="1400"/>
+                <a:spcPts val="1600"/>
               </a:spcAft>
               <a:buSzPct val="100000"/>
               <a:buChar char="•"/>
@@ -8627,7 +8603,7 @@
           <a:p>
             <a:pPr algn="l" marL="355600" indent="-355600">
               <a:spcAft>
-                <a:spcPts val="1400"/>
+                <a:spcPts val="1600"/>
               </a:spcAft>
               <a:buSzPct val="100000"/>
               <a:buChar char="•"/>
@@ -8670,7 +8646,7 @@
           <a:p>
             <a:pPr algn="l" marL="355600" indent="-355600">
               <a:spcAft>
-                <a:spcPts val="1400"/>
+                <a:spcPts val="1600"/>
               </a:spcAft>
               <a:buSzPct val="100000"/>
               <a:buChar char="•"/>
@@ -9148,11 +9124,11 @@
         <p:spPr>
           <a:xfrm>
             <a:off x="502920" y="1691640"/>
-            <a:ext cx="4334256" cy="3026664"/>
+            <a:ext cx="4197096" cy="2825496"/>
           </a:xfrm>
           <a:prstGeom prst="roundRect">
             <a:avLst>
-              <a:gd name="adj" fmla="val 2417"/>
+              <a:gd name="adj" fmla="val 2589"/>
             </a:avLst>
           </a:prstGeom>
           <a:solidFill>
@@ -9169,8 +9145,8 @@
         </p:nvSpPr>
         <p:spPr>
           <a:xfrm>
-            <a:off x="640080" y="1856232"/>
-            <a:ext cx="4059936" cy="502920"/>
+            <a:off x="640080" y="1828800"/>
+            <a:ext cx="3922776" cy="457200"/>
           </a:xfrm>
           <a:prstGeom prst="rect">
             <a:avLst/>
@@ -9186,7 +9162,7 @@
               <a:buNone/>
             </a:pPr>
             <a:r>
-              <a:rPr lang="ja-JP" altLang="en-US" sz="2600" b="1" dirty="0">
+              <a:rPr lang="ja-JP" altLang="en-US" sz="2400" b="1" dirty="0">
                 <a:solidFill>
                   <a:srgbClr val="0072B2"/>
                 </a:solidFill>
@@ -9196,7 +9172,7 @@
               </a:rPr>
               <a:t>検査</a:t>
             </a:r>
-            <a:endParaRPr lang="ja-JP" sz="2600" dirty="0"/>
+            <a:endParaRPr lang="ja-JP" sz="2400" dirty="0"/>
           </a:p>
         </p:txBody>
       </p:sp>
@@ -9208,8 +9184,8 @@
         </p:nvSpPr>
         <p:spPr>
           <a:xfrm>
-            <a:off x="640080" y="2468880"/>
-            <a:ext cx="4059936" cy="420624"/>
+            <a:off x="640080" y="2359152"/>
+            <a:ext cx="3922776" cy="420624"/>
           </a:xfrm>
           <a:prstGeom prst="rect">
             <a:avLst/>
@@ -9250,8 +9226,8 @@
         </p:nvSpPr>
         <p:spPr>
           <a:xfrm>
-            <a:off x="640080" y="2985516"/>
-            <a:ext cx="4059936" cy="0"/>
+            <a:off x="640080" y="2860243"/>
+            <a:ext cx="3922776" cy="0"/>
           </a:xfrm>
           <a:prstGeom prst="line">
             <a:avLst/>
@@ -9273,8 +9249,8 @@
         </p:nvSpPr>
         <p:spPr>
           <a:xfrm>
-            <a:off x="640080" y="3081528"/>
-            <a:ext cx="4059936" cy="859536"/>
+            <a:off x="640080" y="2939796"/>
+            <a:ext cx="3922776" cy="859536"/>
           </a:xfrm>
           <a:prstGeom prst="rect">
             <a:avLst/>
@@ -9335,8 +9311,8 @@
         </p:nvSpPr>
         <p:spPr>
           <a:xfrm>
-            <a:off x="640080" y="4037076"/>
-            <a:ext cx="4059936" cy="0"/>
+            <a:off x="640080" y="3878885"/>
+            <a:ext cx="3922776" cy="0"/>
           </a:xfrm>
           <a:prstGeom prst="line">
             <a:avLst/>
@@ -9358,8 +9334,8 @@
         </p:nvSpPr>
         <p:spPr>
           <a:xfrm>
-            <a:off x="640080" y="4133088"/>
-            <a:ext cx="4059936" cy="420624"/>
+            <a:off x="640080" y="3959352"/>
+            <a:ext cx="3922776" cy="420624"/>
           </a:xfrm>
           <a:prstGeom prst="rect">
             <a:avLst/>
@@ -9400,12 +9376,12 @@
         </p:nvSpPr>
         <p:spPr>
           <a:xfrm>
-            <a:off x="5056632" y="1691640"/>
-            <a:ext cx="6629400" cy="3026664"/>
+            <a:off x="4919472" y="1691640"/>
+            <a:ext cx="6766560" cy="2825496"/>
           </a:xfrm>
           <a:prstGeom prst="roundRect">
             <a:avLst>
-              <a:gd name="adj" fmla="val 2417"/>
+              <a:gd name="adj" fmla="val 2589"/>
             </a:avLst>
           </a:prstGeom>
           <a:solidFill>
@@ -9422,8 +9398,8 @@
         </p:nvSpPr>
         <p:spPr>
           <a:xfrm>
-            <a:off x="5193792" y="1856232"/>
-            <a:ext cx="6355080" cy="502920"/>
+            <a:off x="5056632" y="1828800"/>
+            <a:ext cx="6492240" cy="457200"/>
           </a:xfrm>
           <a:prstGeom prst="rect">
             <a:avLst/>
@@ -9439,7 +9415,7 @@
               <a:buNone/>
             </a:pPr>
             <a:r>
-              <a:rPr lang="ja-JP" altLang="en-US" sz="2600" b="1" dirty="0">
+              <a:rPr lang="ja-JP" altLang="en-US" sz="2400" b="1" dirty="0">
                 <a:solidFill>
                   <a:srgbClr val="D55E00"/>
                 </a:solidFill>
@@ -9449,7 +9425,7 @@
               </a:rPr>
               <a:t>準備量</a:t>
             </a:r>
-            <a:endParaRPr lang="ja-JP" sz="2600" dirty="0"/>
+            <a:endParaRPr lang="ja-JP" sz="2400" dirty="0"/>
           </a:p>
         </p:txBody>
       </p:sp>
@@ -9461,8 +9437,8 @@
         </p:nvSpPr>
         <p:spPr>
           <a:xfrm>
-            <a:off x="5193792" y="2468880"/>
-            <a:ext cx="6355080" cy="859536"/>
+            <a:off x="5056632" y="2359152"/>
+            <a:ext cx="6492240" cy="859536"/>
           </a:xfrm>
           <a:prstGeom prst="rect">
             <a:avLst/>
@@ -9534,8 +9510,8 @@
         </p:nvSpPr>
         <p:spPr>
           <a:xfrm>
-            <a:off x="5193792" y="3424428"/>
-            <a:ext cx="6355080" cy="0"/>
+            <a:off x="5056632" y="3299155"/>
+            <a:ext cx="6492240" cy="0"/>
           </a:xfrm>
           <a:prstGeom prst="line">
             <a:avLst/>
@@ -9557,8 +9533,8 @@
         </p:nvSpPr>
         <p:spPr>
           <a:xfrm>
-            <a:off x="5193792" y="3520440"/>
-            <a:ext cx="6355080" cy="420624"/>
+            <a:off x="5056632" y="3378708"/>
+            <a:ext cx="6492240" cy="420624"/>
           </a:xfrm>
           <a:prstGeom prst="rect">
             <a:avLst/>
@@ -9610,8 +9586,8 @@
         </p:nvSpPr>
         <p:spPr>
           <a:xfrm>
-            <a:off x="5193792" y="4037076"/>
-            <a:ext cx="6355080" cy="0"/>
+            <a:off x="5056632" y="3878885"/>
+            <a:ext cx="6492240" cy="0"/>
           </a:xfrm>
           <a:prstGeom prst="line">
             <a:avLst/>
@@ -9633,8 +9609,8 @@
         </p:nvSpPr>
         <p:spPr>
           <a:xfrm>
-            <a:off x="5193792" y="4133088"/>
-            <a:ext cx="6355080" cy="420624"/>
+            <a:off x="5056632" y="3959352"/>
+            <a:ext cx="6492240" cy="420624"/>
           </a:xfrm>
           <a:prstGeom prst="rect">
             <a:avLst/>
@@ -9686,12 +9662,12 @@
         </p:nvSpPr>
         <p:spPr>
           <a:xfrm>
-            <a:off x="502920" y="4956048"/>
-            <a:ext cx="11183112" cy="914400"/>
+            <a:off x="502920" y="4846320"/>
+            <a:ext cx="11183112" cy="1024128"/>
           </a:xfrm>
           <a:prstGeom prst="roundRect">
             <a:avLst>
-              <a:gd name="adj" fmla="val 10000"/>
+              <a:gd name="adj" fmla="val 8929"/>
             </a:avLst>
           </a:prstGeom>
           <a:solidFill>
@@ -9704,7 +9680,7 @@
           </a:ln>
         </p:spPr>
         <p:txBody>
-          <a:bodyPr wrap="square" lIns="91440" tIns="91440" rIns="91440" bIns="91440" rtlCol="0" anchor="ctr"/>
+          <a:bodyPr wrap="square" lIns="54864" tIns="54864" rIns="54864" bIns="54864" rtlCol="0" anchor="ctr"/>
           <a:lstStyle/>
           <a:p>
             <a:pPr algn="ctr" indent="0" marL="0">
@@ -10130,8 +10106,8 @@
         </p:nvSpPr>
         <p:spPr>
           <a:xfrm>
-            <a:off x="502920" y="1810512"/>
-            <a:ext cx="11155680" cy="3831336"/>
+            <a:off x="502920" y="1828800"/>
+            <a:ext cx="11155680" cy="4023360"/>
           </a:xfrm>
           <a:prstGeom prst="rect">
             <a:avLst/>
@@ -10145,7 +10121,7 @@
           <a:p>
             <a:pPr algn="l" marL="355600" indent="-355600">
               <a:spcAft>
-                <a:spcPts val="2800"/>
+                <a:spcPts val="3100"/>
               </a:spcAft>
               <a:buSzPct val="100000"/>
               <a:buChar char="•"/>
@@ -10177,7 +10153,7 @@
           <a:p>
             <a:pPr algn="l" marL="355600" indent="-355600">
               <a:spcAft>
-                <a:spcPts val="2800"/>
+                <a:spcPts val="3100"/>
               </a:spcAft>
               <a:buSzPct val="100000"/>
               <a:buChar char="•"/>
@@ -10198,7 +10174,7 @@
           <a:p>
             <a:pPr algn="l" marL="355600" indent="-355600">
               <a:spcAft>
-                <a:spcPts val="2800"/>
+                <a:spcPts val="3100"/>
               </a:spcAft>
               <a:buSzPct val="100000"/>
               <a:buChar char="•"/>
@@ -10219,7 +10195,7 @@
           <a:p>
             <a:pPr algn="l" marL="355600" indent="-355600">
               <a:spcAft>
-                <a:spcPts val="2800"/>
+                <a:spcPts val="3100"/>
               </a:spcAft>
               <a:buSzPct val="100000"/>
               <a:buChar char="•"/>
@@ -10240,7 +10216,7 @@
           <a:p>
             <a:pPr algn="l" marL="355600" indent="-355600">
               <a:spcAft>
-                <a:spcPts val="2800"/>
+                <a:spcPts val="3100"/>
               </a:spcAft>
               <a:buSzPct val="100000"/>
               <a:buChar char="•"/>
